--- a/Abschlusspraesentation/CryptoBroker_Abschlusspraesentation (2).pptx
+++ b/Abschlusspraesentation/CryptoBroker_Abschlusspraesentation (2).pptx
@@ -135,6 +135,293 @@
     </p:ext>
   </p:extLst>
 </p:presentation>
+</file>
+
+<file path=ppt/revisionInfo.xml><?xml version="1.0" encoding="utf-8"?>
+<p1510:revInfo xmlns:a="http://schemas.openxmlformats.org/drawingml/2006/main" xmlns:r="http://schemas.openxmlformats.org/officeDocument/2006/relationships" xmlns:p1510="http://schemas.microsoft.com/office/powerpoint/2015/10/main">
+  <p1510:revLst>
+    <p1510:client id="{E0BC7ADA-1E63-4221-B13C-6A24A8C93E95}" v="3" dt="2026-06-10T10:23:39.828"/>
+  </p1510:revLst>
+</p1510:revInfo>
+</file>
+
+<file path=ppt/changesInfos/changesInfo1.xml><?xml version="1.0" encoding="utf-8"?>
+<pc:chgInfo xmlns:a="http://schemas.openxmlformats.org/drawingml/2006/main" xmlns:r="http://schemas.openxmlformats.org/officeDocument/2006/relationships" xmlns:ac="http://schemas.microsoft.com/office/drawing/2013/main/command" xmlns:pc="http://schemas.microsoft.com/office/powerpoint/2013/main/command">
+  <pc:docChgLst>
+    <pc:chgData name="Schueler, Julian (SI B PRO SEC PD SEC2)" userId="ec072b48-c32d-454c-b784-b03f38af36da" providerId="ADAL" clId="{CF6634DC-412A-4C84-A316-BD6025EE1971}"/>
+    <pc:docChg chg="undo custSel modSld">
+      <pc:chgData name="Schueler, Julian (SI B PRO SEC PD SEC2)" userId="ec072b48-c32d-454c-b784-b03f38af36da" providerId="ADAL" clId="{CF6634DC-412A-4C84-A316-BD6025EE1971}" dt="2026-06-10T13:13:25.834" v="140" actId="14100"/>
+      <pc:docMkLst>
+        <pc:docMk/>
+      </pc:docMkLst>
+      <pc:sldChg chg="addSp delSp modSp mod">
+        <pc:chgData name="Schueler, Julian (SI B PRO SEC PD SEC2)" userId="ec072b48-c32d-454c-b784-b03f38af36da" providerId="ADAL" clId="{CF6634DC-412A-4C84-A316-BD6025EE1971}" dt="2026-06-10T12:57:39.942" v="61" actId="14100"/>
+        <pc:sldMkLst>
+          <pc:docMk/>
+          <pc:sldMk cId="0" sldId="256"/>
+        </pc:sldMkLst>
+        <pc:spChg chg="mod">
+          <ac:chgData name="Schueler, Julian (SI B PRO SEC PD SEC2)" userId="ec072b48-c32d-454c-b784-b03f38af36da" providerId="ADAL" clId="{CF6634DC-412A-4C84-A316-BD6025EE1971}" dt="2026-06-10T12:57:39.942" v="61" actId="14100"/>
+          <ac:spMkLst>
+            <pc:docMk/>
+            <pc:sldMk cId="0" sldId="256"/>
+            <ac:spMk id="8" creationId="{00000000-0000-0000-0000-000000000000}"/>
+          </ac:spMkLst>
+        </pc:spChg>
+        <pc:picChg chg="add mod modCrop">
+          <ac:chgData name="Schueler, Julian (SI B PRO SEC PD SEC2)" userId="ec072b48-c32d-454c-b784-b03f38af36da" providerId="ADAL" clId="{CF6634DC-412A-4C84-A316-BD6025EE1971}" dt="2026-06-10T12:57:33.629" v="59" actId="1076"/>
+          <ac:picMkLst>
+            <pc:docMk/>
+            <pc:sldMk cId="0" sldId="256"/>
+            <ac:picMk id="3" creationId="{0189A92C-1096-FB18-1861-0488419CD027}"/>
+          </ac:picMkLst>
+        </pc:picChg>
+        <pc:picChg chg="del">
+          <ac:chgData name="Schueler, Julian (SI B PRO SEC PD SEC2)" userId="ec072b48-c32d-454c-b784-b03f38af36da" providerId="ADAL" clId="{CF6634DC-412A-4C84-A316-BD6025EE1971}" dt="2026-06-10T12:57:24.775" v="57" actId="478"/>
+          <ac:picMkLst>
+            <pc:docMk/>
+            <pc:sldMk cId="0" sldId="256"/>
+            <ac:picMk id="9" creationId="{00000000-0000-0000-0000-000000000000}"/>
+          </ac:picMkLst>
+        </pc:picChg>
+      </pc:sldChg>
+      <pc:sldChg chg="addSp delSp modSp mod">
+        <pc:chgData name="Schueler, Julian (SI B PRO SEC PD SEC2)" userId="ec072b48-c32d-454c-b784-b03f38af36da" providerId="ADAL" clId="{CF6634DC-412A-4C84-A316-BD6025EE1971}" dt="2026-06-10T12:58:55.886" v="69" actId="14100"/>
+        <pc:sldMkLst>
+          <pc:docMk/>
+          <pc:sldMk cId="0" sldId="261"/>
+        </pc:sldMkLst>
+        <pc:spChg chg="mod">
+          <ac:chgData name="Schueler, Julian (SI B PRO SEC PD SEC2)" userId="ec072b48-c32d-454c-b784-b03f38af36da" providerId="ADAL" clId="{CF6634DC-412A-4C84-A316-BD6025EE1971}" dt="2026-06-10T12:58:55.886" v="69" actId="14100"/>
+          <ac:spMkLst>
+            <pc:docMk/>
+            <pc:sldMk cId="0" sldId="261"/>
+            <ac:spMk id="192" creationId="{00000000-0000-0000-0000-000000000000}"/>
+          </ac:spMkLst>
+        </pc:spChg>
+        <pc:picChg chg="add mod modCrop">
+          <ac:chgData name="Schueler, Julian (SI B PRO SEC PD SEC2)" userId="ec072b48-c32d-454c-b784-b03f38af36da" providerId="ADAL" clId="{CF6634DC-412A-4C84-A316-BD6025EE1971}" dt="2026-06-10T12:58:49.678" v="68" actId="14100"/>
+          <ac:picMkLst>
+            <pc:docMk/>
+            <pc:sldMk cId="0" sldId="261"/>
+            <ac:picMk id="3" creationId="{DE82CF63-FA6C-BFB7-2E15-F0EAAFE5AB6D}"/>
+          </ac:picMkLst>
+        </pc:picChg>
+        <pc:picChg chg="del">
+          <ac:chgData name="Schueler, Julian (SI B PRO SEC PD SEC2)" userId="ec072b48-c32d-454c-b784-b03f38af36da" providerId="ADAL" clId="{CF6634DC-412A-4C84-A316-BD6025EE1971}" dt="2026-06-10T12:58:24.016" v="62" actId="478"/>
+          <ac:picMkLst>
+            <pc:docMk/>
+            <pc:sldMk cId="0" sldId="261"/>
+            <ac:picMk id="193" creationId="{00000000-0000-0000-0000-000000000000}"/>
+          </ac:picMkLst>
+        </pc:picChg>
+      </pc:sldChg>
+      <pc:sldChg chg="addSp delSp modSp mod">
+        <pc:chgData name="Schueler, Julian (SI B PRO SEC PD SEC2)" userId="ec072b48-c32d-454c-b784-b03f38af36da" providerId="ADAL" clId="{CF6634DC-412A-4C84-A316-BD6025EE1971}" dt="2026-06-10T13:12:16.612" v="134" actId="1035"/>
+        <pc:sldMkLst>
+          <pc:docMk/>
+          <pc:sldMk cId="0" sldId="262"/>
+        </pc:sldMkLst>
+        <pc:spChg chg="mod">
+          <ac:chgData name="Schueler, Julian (SI B PRO SEC PD SEC2)" userId="ec072b48-c32d-454c-b784-b03f38af36da" providerId="ADAL" clId="{CF6634DC-412A-4C84-A316-BD6025EE1971}" dt="2026-06-10T13:01:55.778" v="75" actId="14100"/>
+          <ac:spMkLst>
+            <pc:docMk/>
+            <pc:sldMk cId="0" sldId="262"/>
+            <ac:spMk id="201" creationId="{00000000-0000-0000-0000-000000000000}"/>
+          </ac:spMkLst>
+        </pc:spChg>
+        <pc:spChg chg="mod">
+          <ac:chgData name="Schueler, Julian (SI B PRO SEC PD SEC2)" userId="ec072b48-c32d-454c-b784-b03f38af36da" providerId="ADAL" clId="{CF6634DC-412A-4C84-A316-BD6025EE1971}" dt="2026-06-10T13:12:10.926" v="113" actId="14100"/>
+          <ac:spMkLst>
+            <pc:docMk/>
+            <pc:sldMk cId="0" sldId="262"/>
+            <ac:spMk id="203" creationId="{00000000-0000-0000-0000-000000000000}"/>
+          </ac:spMkLst>
+        </pc:spChg>
+        <pc:spChg chg="mod">
+          <ac:chgData name="Schueler, Julian (SI B PRO SEC PD SEC2)" userId="ec072b48-c32d-454c-b784-b03f38af36da" providerId="ADAL" clId="{CF6634DC-412A-4C84-A316-BD6025EE1971}" dt="2026-06-10T13:02:02.978" v="102" actId="1035"/>
+          <ac:spMkLst>
+            <pc:docMk/>
+            <pc:sldMk cId="0" sldId="262"/>
+            <ac:spMk id="205" creationId="{00000000-0000-0000-0000-000000000000}"/>
+          </ac:spMkLst>
+        </pc:spChg>
+        <pc:spChg chg="mod">
+          <ac:chgData name="Schueler, Julian (SI B PRO SEC PD SEC2)" userId="ec072b48-c32d-454c-b784-b03f38af36da" providerId="ADAL" clId="{CF6634DC-412A-4C84-A316-BD6025EE1971}" dt="2026-06-10T13:12:16.612" v="134" actId="1035"/>
+          <ac:spMkLst>
+            <pc:docMk/>
+            <pc:sldMk cId="0" sldId="262"/>
+            <ac:spMk id="206" creationId="{00000000-0000-0000-0000-000000000000}"/>
+          </ac:spMkLst>
+        </pc:spChg>
+        <pc:picChg chg="add mod">
+          <ac:chgData name="Schueler, Julian (SI B PRO SEC PD SEC2)" userId="ec072b48-c32d-454c-b784-b03f38af36da" providerId="ADAL" clId="{CF6634DC-412A-4C84-A316-BD6025EE1971}" dt="2026-06-10T13:01:52.327" v="74" actId="14100"/>
+          <ac:picMkLst>
+            <pc:docMk/>
+            <pc:sldMk cId="0" sldId="262"/>
+            <ac:picMk id="3" creationId="{E1F6F8E7-295C-24DC-8AAA-8840F907E5CD}"/>
+          </ac:picMkLst>
+        </pc:picChg>
+        <pc:picChg chg="add mod">
+          <ac:chgData name="Schueler, Julian (SI B PRO SEC PD SEC2)" userId="ec072b48-c32d-454c-b784-b03f38af36da" providerId="ADAL" clId="{CF6634DC-412A-4C84-A316-BD6025EE1971}" dt="2026-06-10T13:12:07.453" v="112" actId="1037"/>
+          <ac:picMkLst>
+            <pc:docMk/>
+            <pc:sldMk cId="0" sldId="262"/>
+            <ac:picMk id="5" creationId="{B04E33BC-EF55-E5E6-91DC-9952ECE79F36}"/>
+          </ac:picMkLst>
+        </pc:picChg>
+        <pc:picChg chg="del">
+          <ac:chgData name="Schueler, Julian (SI B PRO SEC PD SEC2)" userId="ec072b48-c32d-454c-b784-b03f38af36da" providerId="ADAL" clId="{CF6634DC-412A-4C84-A316-BD6025EE1971}" dt="2026-06-10T13:01:43.697" v="70" actId="478"/>
+          <ac:picMkLst>
+            <pc:docMk/>
+            <pc:sldMk cId="0" sldId="262"/>
+            <ac:picMk id="202" creationId="{00000000-0000-0000-0000-000000000000}"/>
+          </ac:picMkLst>
+        </pc:picChg>
+        <pc:picChg chg="del">
+          <ac:chgData name="Schueler, Julian (SI B PRO SEC PD SEC2)" userId="ec072b48-c32d-454c-b784-b03f38af36da" providerId="ADAL" clId="{CF6634DC-412A-4C84-A316-BD6025EE1971}" dt="2026-06-10T13:11:54.370" v="105" actId="478"/>
+          <ac:picMkLst>
+            <pc:docMk/>
+            <pc:sldMk cId="0" sldId="262"/>
+            <ac:picMk id="204" creationId="{00000000-0000-0000-0000-000000000000}"/>
+          </ac:picMkLst>
+        </pc:picChg>
+      </pc:sldChg>
+      <pc:sldChg chg="addSp delSp modSp mod">
+        <pc:chgData name="Schueler, Julian (SI B PRO SEC PD SEC2)" userId="ec072b48-c32d-454c-b784-b03f38af36da" providerId="ADAL" clId="{CF6634DC-412A-4C84-A316-BD6025EE1971}" dt="2026-06-10T10:23:39.904" v="24" actId="27636"/>
+        <pc:sldMkLst>
+          <pc:docMk/>
+          <pc:sldMk cId="0" sldId="265"/>
+        </pc:sldMkLst>
+        <pc:spChg chg="add del">
+          <ac:chgData name="Schueler, Julian (SI B PRO SEC PD SEC2)" userId="ec072b48-c32d-454c-b784-b03f38af36da" providerId="ADAL" clId="{CF6634DC-412A-4C84-A316-BD6025EE1971}" dt="2026-06-10T10:05:20.544" v="10" actId="478"/>
+          <ac:spMkLst>
+            <pc:docMk/>
+            <pc:sldMk cId="0" sldId="265"/>
+            <ac:spMk id="6" creationId="{DF48C0D0-9DC8-745F-E3AB-E13DB8931A19}"/>
+          </ac:spMkLst>
+        </pc:spChg>
+        <pc:spChg chg="mod">
+          <ac:chgData name="Schueler, Julian (SI B PRO SEC PD SEC2)" userId="ec072b48-c32d-454c-b784-b03f38af36da" providerId="ADAL" clId="{CF6634DC-412A-4C84-A316-BD6025EE1971}" dt="2026-06-10T10:06:00.335" v="19" actId="14100"/>
+          <ac:spMkLst>
+            <pc:docMk/>
+            <pc:sldMk cId="0" sldId="265"/>
+            <ac:spMk id="269" creationId="{00000000-0000-0000-0000-000000000000}"/>
+          </ac:spMkLst>
+        </pc:spChg>
+        <pc:spChg chg="mod">
+          <ac:chgData name="Schueler, Julian (SI B PRO SEC PD SEC2)" userId="ec072b48-c32d-454c-b784-b03f38af36da" providerId="ADAL" clId="{CF6634DC-412A-4C84-A316-BD6025EE1971}" dt="2026-06-10T10:23:39.904" v="24" actId="27636"/>
+          <ac:spMkLst>
+            <pc:docMk/>
+            <pc:sldMk cId="0" sldId="265"/>
+            <ac:spMk id="275" creationId="{00000000-0000-0000-0000-000000000000}"/>
+          </ac:spMkLst>
+        </pc:spChg>
+        <pc:picChg chg="add del mod">
+          <ac:chgData name="Schueler, Julian (SI B PRO SEC PD SEC2)" userId="ec072b48-c32d-454c-b784-b03f38af36da" providerId="ADAL" clId="{CF6634DC-412A-4C84-A316-BD6025EE1971}" dt="2026-06-10T10:03:08.646" v="3" actId="478"/>
+          <ac:picMkLst>
+            <pc:docMk/>
+            <pc:sldMk cId="0" sldId="265"/>
+            <ac:picMk id="3" creationId="{26EBB080-1BDA-E286-BD64-CF08A41F8481}"/>
+          </ac:picMkLst>
+        </pc:picChg>
+        <pc:picChg chg="add del mod">
+          <ac:chgData name="Schueler, Julian (SI B PRO SEC PD SEC2)" userId="ec072b48-c32d-454c-b784-b03f38af36da" providerId="ADAL" clId="{CF6634DC-412A-4C84-A316-BD6025EE1971}" dt="2026-06-10T10:05:18.588" v="8" actId="478"/>
+          <ac:picMkLst>
+            <pc:docMk/>
+            <pc:sldMk cId="0" sldId="265"/>
+            <ac:picMk id="5" creationId="{7F561B53-0E8E-E8BF-0DF9-760AA7052834}"/>
+          </ac:picMkLst>
+        </pc:picChg>
+        <pc:picChg chg="add mod">
+          <ac:chgData name="Schueler, Julian (SI B PRO SEC PD SEC2)" userId="ec072b48-c32d-454c-b784-b03f38af36da" providerId="ADAL" clId="{CF6634DC-412A-4C84-A316-BD6025EE1971}" dt="2026-06-10T10:06:06.078" v="20" actId="1076"/>
+          <ac:picMkLst>
+            <pc:docMk/>
+            <pc:sldMk cId="0" sldId="265"/>
+            <ac:picMk id="8" creationId="{D3D6F2E3-F805-595A-7122-AAFF0C66A9DD}"/>
+          </ac:picMkLst>
+        </pc:picChg>
+        <pc:picChg chg="del">
+          <ac:chgData name="Schueler, Julian (SI B PRO SEC PD SEC2)" userId="ec072b48-c32d-454c-b784-b03f38af36da" providerId="ADAL" clId="{CF6634DC-412A-4C84-A316-BD6025EE1971}" dt="2026-06-10T10:02:04.130" v="0" actId="478"/>
+          <ac:picMkLst>
+            <pc:docMk/>
+            <pc:sldMk cId="0" sldId="265"/>
+            <ac:picMk id="270" creationId="{00000000-0000-0000-0000-000000000000}"/>
+          </ac:picMkLst>
+        </pc:picChg>
+      </pc:sldChg>
+      <pc:sldChg chg="addSp modSp mod">
+        <pc:chgData name="Schueler, Julian (SI B PRO SEC PD SEC2)" userId="ec072b48-c32d-454c-b784-b03f38af36da" providerId="ADAL" clId="{CF6634DC-412A-4C84-A316-BD6025EE1971}" dt="2026-06-10T10:24:11.753" v="29" actId="14100"/>
+        <pc:sldMkLst>
+          <pc:docMk/>
+          <pc:sldMk cId="0" sldId="267"/>
+        </pc:sldMkLst>
+        <pc:spChg chg="add mod">
+          <ac:chgData name="Schueler, Julian (SI B PRO SEC PD SEC2)" userId="ec072b48-c32d-454c-b784-b03f38af36da" providerId="ADAL" clId="{CF6634DC-412A-4C84-A316-BD6025EE1971}" dt="2026-06-10T10:24:11.753" v="29" actId="14100"/>
+          <ac:spMkLst>
+            <pc:docMk/>
+            <pc:sldMk cId="0" sldId="267"/>
+            <ac:spMk id="2" creationId="{1647C7AC-93DF-6372-29D4-4BB66E1AD7CF}"/>
+          </ac:spMkLst>
+        </pc:spChg>
+        <pc:spChg chg="mod">
+          <ac:chgData name="Schueler, Julian (SI B PRO SEC PD SEC2)" userId="ec072b48-c32d-454c-b784-b03f38af36da" providerId="ADAL" clId="{CF6634DC-412A-4C84-A316-BD6025EE1971}" dt="2026-06-10T10:23:38.341" v="22" actId="1076"/>
+          <ac:spMkLst>
+            <pc:docMk/>
+            <pc:sldMk cId="0" sldId="267"/>
+            <ac:spMk id="328" creationId="{00000000-0000-0000-0000-000000000000}"/>
+          </ac:spMkLst>
+        </pc:spChg>
+      </pc:sldChg>
+      <pc:sldChg chg="modSp mod">
+        <pc:chgData name="Schueler, Julian (SI B PRO SEC PD SEC2)" userId="ec072b48-c32d-454c-b784-b03f38af36da" providerId="ADAL" clId="{CF6634DC-412A-4C84-A316-BD6025EE1971}" dt="2026-06-10T12:51:18.661" v="48" actId="20577"/>
+        <pc:sldMkLst>
+          <pc:docMk/>
+          <pc:sldMk cId="0" sldId="275"/>
+        </pc:sldMkLst>
+        <pc:graphicFrameChg chg="modGraphic">
+          <ac:chgData name="Schueler, Julian (SI B PRO SEC PD SEC2)" userId="ec072b48-c32d-454c-b784-b03f38af36da" providerId="ADAL" clId="{CF6634DC-412A-4C84-A316-BD6025EE1971}" dt="2026-06-10T12:51:18.661" v="48" actId="20577"/>
+          <ac:graphicFrameMkLst>
+            <pc:docMk/>
+            <pc:sldMk cId="0" sldId="275"/>
+            <ac:graphicFrameMk id="549" creationId="{00000000-0000-0000-0000-000000000000}"/>
+          </ac:graphicFrameMkLst>
+        </pc:graphicFrameChg>
+      </pc:sldChg>
+      <pc:sldChg chg="addSp delSp modSp mod">
+        <pc:chgData name="Schueler, Julian (SI B PRO SEC PD SEC2)" userId="ec072b48-c32d-454c-b784-b03f38af36da" providerId="ADAL" clId="{CF6634DC-412A-4C84-A316-BD6025EE1971}" dt="2026-06-10T13:13:25.834" v="140" actId="14100"/>
+        <pc:sldMkLst>
+          <pc:docMk/>
+          <pc:sldMk cId="0" sldId="278"/>
+        </pc:sldMkLst>
+        <pc:spChg chg="mod">
+          <ac:chgData name="Schueler, Julian (SI B PRO SEC PD SEC2)" userId="ec072b48-c32d-454c-b784-b03f38af36da" providerId="ADAL" clId="{CF6634DC-412A-4C84-A316-BD6025EE1971}" dt="2026-06-10T13:13:25.834" v="140" actId="14100"/>
+          <ac:spMkLst>
+            <pc:docMk/>
+            <pc:sldMk cId="0" sldId="278"/>
+            <ac:spMk id="615" creationId="{00000000-0000-0000-0000-000000000000}"/>
+          </ac:spMkLst>
+        </pc:spChg>
+        <pc:picChg chg="add mod modCrop">
+          <ac:chgData name="Schueler, Julian (SI B PRO SEC PD SEC2)" userId="ec072b48-c32d-454c-b784-b03f38af36da" providerId="ADAL" clId="{CF6634DC-412A-4C84-A316-BD6025EE1971}" dt="2026-06-10T13:13:21.353" v="139" actId="732"/>
+          <ac:picMkLst>
+            <pc:docMk/>
+            <pc:sldMk cId="0" sldId="278"/>
+            <ac:picMk id="3" creationId="{DBCC3429-8C30-2166-CE8F-9C71AF2DA32E}"/>
+          </ac:picMkLst>
+        </pc:picChg>
+        <pc:picChg chg="del">
+          <ac:chgData name="Schueler, Julian (SI B PRO SEC PD SEC2)" userId="ec072b48-c32d-454c-b784-b03f38af36da" providerId="ADAL" clId="{CF6634DC-412A-4C84-A316-BD6025EE1971}" dt="2026-06-10T13:12:42.447" v="135" actId="478"/>
+          <ac:picMkLst>
+            <pc:docMk/>
+            <pc:sldMk cId="0" sldId="278"/>
+            <ac:picMk id="616" creationId="{00000000-0000-0000-0000-000000000000}"/>
+          </ac:picMkLst>
+        </pc:picChg>
+      </pc:sldChg>
+    </pc:docChg>
+  </pc:docChgLst>
+</pc:chgInfo>
 </file>
 
 <file path=ppt/charts/chart1.xml><?xml version="1.0" encoding="utf-8"?>
@@ -5256,8 +5543,8 @@
         </p:nvSpPr>
         <p:spPr>
           <a:xfrm>
-            <a:off x="5020200" y="1362600"/>
-            <a:ext cx="3767040" cy="2568960"/>
+            <a:off x="4969165" y="1362600"/>
+            <a:ext cx="4050144" cy="2484345"/>
           </a:xfrm>
           <a:prstGeom prst="roundRect">
             <a:avLst>
@@ -5308,29 +5595,6 @@
           </a:p>
         </p:txBody>
       </p:sp>
-      <p:pic>
-        <p:nvPicPr>
-          <p:cNvPr id="9" name="Image 0" descr="/home/claude/deck/assets/dashboard.png"/>
-          <p:cNvPicPr/>
-          <p:nvPr/>
-        </p:nvPicPr>
-        <p:blipFill>
-          <a:blip r:embed="rId3"/>
-          <a:stretch/>
-        </p:blipFill>
-        <p:spPr>
-          <a:xfrm>
-            <a:off x="5074920" y="1417320"/>
-            <a:ext cx="3657240" cy="2459520"/>
-          </a:xfrm>
-          <a:prstGeom prst="rect">
-            <a:avLst/>
-          </a:prstGeom>
-          <a:ln w="0">
-            <a:noFill/>
-          </a:ln>
-        </p:spPr>
-      </p:pic>
       <p:sp>
         <p:nvSpPr>
           <p:cNvPr id="10" name="Shape 1"/>
@@ -6089,6 +6353,37 @@
           </a:p>
         </p:txBody>
       </p:sp>
+      <p:pic>
+        <p:nvPicPr>
+          <p:cNvPr id="3" name="Grafik 2">
+            <a:extLst>
+              <a:ext uri="{FF2B5EF4-FFF2-40B4-BE49-F238E27FC236}">
+                <a16:creationId xmlns:a16="http://schemas.microsoft.com/office/drawing/2014/main" id="{0189A92C-1096-FB18-1861-0488419CD027}"/>
+              </a:ext>
+            </a:extLst>
+          </p:cNvPr>
+          <p:cNvPicPr>
+            <a:picLocks noChangeAspect="1"/>
+          </p:cNvPicPr>
+          <p:nvPr/>
+        </p:nvPicPr>
+        <p:blipFill>
+          <a:blip r:embed="rId3"/>
+          <a:srcRect r="1211" b="4997"/>
+          <a:stretch>
+            <a:fillRect/>
+          </a:stretch>
+        </p:blipFill>
+        <p:spPr>
+          <a:xfrm>
+            <a:off x="5057642" y="1436122"/>
+            <a:ext cx="3924221" cy="2358638"/>
+          </a:xfrm>
+          <a:prstGeom prst="rect">
+            <a:avLst/>
+          </a:prstGeom>
+        </p:spPr>
+      </p:pic>
     </p:spTree>
   </p:cSld>
   <p:clrMapOvr>
@@ -6339,7 +6634,7 @@
                 <a:latin typeface="Trebuchet MS"/>
                 <a:ea typeface="Trebuchet MS"/>
               </a:rPr>
-              <a:t>Architektur: 3 Schichten / MVC</a:t>
+              <a:t>Architektur: 3 Schichten mit MVC-Elementen</a:t>
             </a:r>
             <a:endParaRPr lang="en-US" sz="3000" b="0" strike="noStrike" spc="-1">
               <a:solidFill>
@@ -6506,8 +6801,8 @@
         </p:nvSpPr>
         <p:spPr>
           <a:xfrm>
-            <a:off x="502920" y="1234440"/>
-            <a:ext cx="8183520" cy="1874160"/>
+            <a:off x="502920" y="1110186"/>
+            <a:ext cx="8183520" cy="2044641"/>
           </a:xfrm>
           <a:prstGeom prst="roundRect">
             <a:avLst>
@@ -6551,29 +6846,6 @@
           </a:p>
         </p:txBody>
       </p:sp>
-      <p:pic>
-        <p:nvPicPr>
-          <p:cNvPr id="270" name="Image 0" descr="/home/claude/deck/assets/component_diagram.png"/>
-          <p:cNvPicPr/>
-          <p:nvPr/>
-        </p:nvPicPr>
-        <p:blipFill>
-          <a:blip r:embed="rId3"/>
-          <a:stretch/>
-        </p:blipFill>
-        <p:spPr>
-          <a:xfrm>
-            <a:off x="685800" y="1371600"/>
-            <a:ext cx="7817760" cy="1590840"/>
-          </a:xfrm>
-          <a:prstGeom prst="rect">
-            <a:avLst/>
-          </a:prstGeom>
-          <a:ln w="0">
-            <a:noFill/>
-          </a:ln>
-        </p:spPr>
-      </p:pic>
       <p:sp>
         <p:nvSpPr>
           <p:cNvPr id="271" name="Shape 7"/>
@@ -6732,7 +7004,7 @@
           <p:nvPr/>
         </p:nvPicPr>
         <p:blipFill>
-          <a:blip r:embed="rId4"/>
+          <a:blip r:embed="rId3"/>
           <a:stretch/>
         </p:blipFill>
         <p:spPr>
@@ -6781,7 +7053,7 @@
         </p:style>
         <p:txBody>
           <a:bodyPr wrap="square" lIns="0" tIns="0" rIns="0" bIns="0" anchor="ctr">
-            <a:normAutofit/>
+            <a:normAutofit fontScale="92500"/>
           </a:bodyPr>
           <a:lstStyle/>
           <a:p>
@@ -6801,7 +7073,7 @@
                 <a:latin typeface="Trebuchet MS"/>
                 <a:ea typeface="Trebuchet MS"/>
               </a:rPr>
-              <a:t>Präsentation / View+Controller</a:t>
+              <a:t>Präsentation / View + Controller (MVC-Elemente)</a:t>
             </a:r>
             <a:endParaRPr lang="en-US" sz="1200" b="0" strike="noStrike" spc="-1">
               <a:solidFill>
@@ -7034,7 +7306,7 @@
           <p:nvPr/>
         </p:nvPicPr>
         <p:blipFill>
-          <a:blip r:embed="rId5"/>
+          <a:blip r:embed="rId4"/>
           <a:stretch/>
         </p:blipFill>
         <p:spPr>
@@ -7336,7 +7608,7 @@
           <p:nvPr/>
         </p:nvPicPr>
         <p:blipFill>
-          <a:blip r:embed="rId6"/>
+          <a:blip r:embed="rId5"/>
           <a:stretch/>
         </p:blipFill>
         <p:spPr>
@@ -7480,6 +7752,42 @@
           </a:p>
         </p:txBody>
       </p:sp>
+      <p:pic>
+        <p:nvPicPr>
+          <p:cNvPr id="8" name="Grafik 7">
+            <a:extLst>
+              <a:ext uri="{FF2B5EF4-FFF2-40B4-BE49-F238E27FC236}">
+                <a16:creationId xmlns:a16="http://schemas.microsoft.com/office/drawing/2014/main" id="{D3D6F2E3-F805-595A-7122-AAFF0C66A9DD}"/>
+              </a:ext>
+            </a:extLst>
+          </p:cNvPr>
+          <p:cNvPicPr>
+            <a:picLocks noChangeAspect="1"/>
+          </p:cNvPicPr>
+          <p:nvPr/>
+        </p:nvPicPr>
+        <p:blipFill>
+          <a:blip r:embed="rId6">
+            <a:extLst>
+              <a:ext uri="{28A0092B-C50C-407E-A947-70E740481C1C}">
+                <a14:useLocalDpi xmlns:a14="http://schemas.microsoft.com/office/drawing/2010/main" val="0"/>
+              </a:ext>
+            </a:extLst>
+          </a:blip>
+          <a:stretch>
+            <a:fillRect/>
+          </a:stretch>
+        </p:blipFill>
+        <p:spPr>
+          <a:xfrm>
+            <a:off x="484560" y="1096772"/>
+            <a:ext cx="8252691" cy="2103628"/>
+          </a:xfrm>
+          <a:prstGeom prst="rect">
+            <a:avLst/>
+          </a:prstGeom>
+        </p:spPr>
+      </p:pic>
     </p:spTree>
   </p:cSld>
   <p:clrMapOvr>
@@ -7897,7 +8205,7 @@
         </p:nvGraphicFramePr>
         <p:xfrm>
           <a:off x="502920" y="1325880"/>
-          <a:ext cx="8183520" cy="3035520"/>
+          <a:ext cx="8183880" cy="3035520"/>
         </p:xfrm>
         <a:graphic>
           <a:graphicData uri="http://schemas.openxmlformats.org/drawingml/2006/table">
@@ -11206,6 +11514,60 @@
           </a:p>
         </p:txBody>
       </p:sp>
+      <p:sp>
+        <p:nvSpPr>
+          <p:cNvPr id="2" name="Shape 31">
+            <a:extLst>
+              <a:ext uri="{FF2B5EF4-FFF2-40B4-BE49-F238E27FC236}">
+                <a16:creationId xmlns:a16="http://schemas.microsoft.com/office/drawing/2014/main" id="{1647C7AC-93DF-6372-29D4-4BB66E1AD7CF}"/>
+              </a:ext>
+            </a:extLst>
+          </p:cNvPr>
+          <p:cNvSpPr/>
+          <p:nvPr/>
+        </p:nvSpPr>
+        <p:spPr>
+          <a:xfrm flipH="1">
+            <a:off x="1671637" y="2724480"/>
+            <a:ext cx="1587" cy="338760"/>
+          </a:xfrm>
+          <a:prstGeom prst="line">
+            <a:avLst/>
+          </a:prstGeom>
+          <a:ln w="15240">
+            <a:solidFill>
+              <a:srgbClr val="6B7596"/>
+            </a:solidFill>
+            <a:round/>
+          </a:ln>
+        </p:spPr>
+        <p:style>
+          <a:lnRef idx="0">
+            <a:scrgbClr r="0" g="0" b="0"/>
+          </a:lnRef>
+          <a:fillRef idx="0">
+            <a:scrgbClr r="0" g="0" b="0"/>
+          </a:fillRef>
+          <a:effectRef idx="0">
+            <a:scrgbClr r="0" g="0" b="0"/>
+          </a:effectRef>
+          <a:fontRef idx="minor"/>
+        </p:style>
+        <p:txBody>
+          <a:bodyPr wrap="square" lIns="90000" tIns="-44640" rIns="90000" bIns="-44640" anchor="t" anchorCtr="1">
+            <a:normAutofit fontScale="40000" lnSpcReduction="20000"/>
+          </a:bodyPr>
+          <a:lstStyle/>
+          <a:p>
+            <a:endParaRPr lang="en-US" sz="1800" b="0" strike="noStrike" spc="-1">
+              <a:solidFill>
+                <a:srgbClr val="FFFFFF"/>
+              </a:solidFill>
+              <a:latin typeface="Arial"/>
+            </a:endParaRPr>
+          </a:p>
+        </p:txBody>
+      </p:sp>
     </p:spTree>
   </p:cSld>
   <p:clrMapOvr>
@@ -27493,7 +27855,13 @@
         <p:nvGraphicFramePr>
           <p:cNvPr id="549" name="Table 0"/>
           <p:cNvGraphicFramePr/>
-          <p:nvPr/>
+          <p:nvPr>
+            <p:extLst>
+              <p:ext uri="{D42A27DB-BD31-4B8C-83A1-F6EECF244321}">
+                <p14:modId xmlns:p14="http://schemas.microsoft.com/office/powerpoint/2010/main" val="2688174896"/>
+              </p:ext>
+            </p:extLst>
+          </p:nvPr>
         </p:nvGraphicFramePr>
         <p:xfrm>
           <a:off x="502920" y="1280160"/>
@@ -28369,16 +28737,36 @@
                         </a:tabLst>
                       </a:pPr>
                       <a:r>
-                        <a:rPr lang="en-US" sz="1050" b="0" strike="noStrike" spc="-1">
+                        <a:rPr lang="en-US" sz="1050" b="0" strike="noStrike" spc="-1" dirty="0">
                           <a:solidFill>
                             <a:srgbClr val="98A2C4"/>
                           </a:solidFill>
                           <a:latin typeface="Calibri"/>
                           <a:ea typeface="Calibri"/>
                         </a:rPr>
-                        <a:t>SQLite Race-Conditions bei Trades</a:t>
+                        <a:t>SQLite Race-Conditions </a:t>
                       </a:r>
-                      <a:endParaRPr lang="en-US" sz="1050" b="0" strike="noStrike" spc="-1">
+                      <a:r>
+                        <a:rPr lang="en-US" sz="1050" b="0" strike="noStrike" spc="-1" dirty="0" err="1">
+                          <a:solidFill>
+                            <a:srgbClr val="98A2C4"/>
+                          </a:solidFill>
+                          <a:latin typeface="Calibri"/>
+                          <a:ea typeface="Calibri"/>
+                        </a:rPr>
+                        <a:t>bei</a:t>
+                      </a:r>
+                      <a:r>
+                        <a:rPr lang="en-US" sz="1050" b="0" strike="noStrike" spc="-1" dirty="0">
+                          <a:solidFill>
+                            <a:srgbClr val="98A2C4"/>
+                          </a:solidFill>
+                          <a:latin typeface="Calibri"/>
+                          <a:ea typeface="Calibri"/>
+                        </a:rPr>
+                        <a:t> Trades</a:t>
+                      </a:r>
+                      <a:endParaRPr lang="en-US" sz="1050" b="0" strike="noStrike" spc="-1" dirty="0">
                         <a:solidFill>
                           <a:srgbClr val="FFFFFF"/>
                         </a:solidFill>
@@ -28613,16 +29001,26 @@
                         </a:tabLst>
                       </a:pPr>
                       <a:r>
-                        <a:rPr lang="en-US" sz="1050" b="0" strike="noStrike" spc="-1">
+                        <a:rPr lang="en-US" sz="1050" b="0" strike="noStrike" spc="-1" dirty="0">
                           <a:solidFill>
                             <a:srgbClr val="98A2C4"/>
                           </a:solidFill>
                           <a:latin typeface="Calibri"/>
                           <a:ea typeface="Calibri"/>
                         </a:rPr>
-                        <a:t>WAL-Modus aktivieren, später PostgreSQL</a:t>
+                        <a:t>WAL-Modus </a:t>
                       </a:r>
-                      <a:endParaRPr lang="en-US" sz="1050" b="0" strike="noStrike" spc="-1">
+                      <a:r>
+                        <a:rPr lang="en-US" sz="1050" b="0" strike="noStrike" spc="-1" dirty="0" err="1">
+                          <a:solidFill>
+                            <a:srgbClr val="98A2C4"/>
+                          </a:solidFill>
+                          <a:latin typeface="Calibri"/>
+                          <a:ea typeface="Calibri"/>
+                        </a:rPr>
+                        <a:t>aktivieren</a:t>
+                      </a:r>
+                      <a:endParaRPr lang="en-US" sz="1050" b="0" strike="noStrike" spc="-1" dirty="0">
                         <a:solidFill>
                           <a:srgbClr val="FFFFFF"/>
                         </a:solidFill>
@@ -28742,16 +29140,66 @@
                         </a:tabLst>
                       </a:pPr>
                       <a:r>
-                        <a:rPr lang="en-US" sz="1050" b="0" strike="noStrike" spc="-1">
+                        <a:rPr lang="en-US" sz="1050" b="0" strike="noStrike" spc="-1" dirty="0" err="1">
                           <a:solidFill>
                             <a:srgbClr val="98A2C4"/>
                           </a:solidFill>
                           <a:latin typeface="Calibri"/>
                           <a:ea typeface="Calibri"/>
                         </a:rPr>
-                        <a:t>Teamausfall (Krankheit / Prüfungsphase)</a:t>
+                        <a:t>Teamausfall</a:t>
                       </a:r>
-                      <a:endParaRPr lang="en-US" sz="1050" b="0" strike="noStrike" spc="-1">
+                      <a:r>
+                        <a:rPr lang="en-US" sz="1050" b="0" strike="noStrike" spc="-1" dirty="0">
+                          <a:solidFill>
+                            <a:srgbClr val="98A2C4"/>
+                          </a:solidFill>
+                          <a:latin typeface="Calibri"/>
+                          <a:ea typeface="Calibri"/>
+                        </a:rPr>
+                        <a:t> (</a:t>
+                      </a:r>
+                      <a:r>
+                        <a:rPr lang="en-US" sz="1050" b="0" strike="noStrike" spc="-1" dirty="0" err="1">
+                          <a:solidFill>
+                            <a:srgbClr val="98A2C4"/>
+                          </a:solidFill>
+                          <a:latin typeface="Calibri"/>
+                          <a:ea typeface="Calibri"/>
+                        </a:rPr>
+                        <a:t>Krankheit</a:t>
+                      </a:r>
+                      <a:r>
+                        <a:rPr lang="en-US" sz="1050" b="0" strike="noStrike" spc="-1" dirty="0">
+                          <a:solidFill>
+                            <a:srgbClr val="98A2C4"/>
+                          </a:solidFill>
+                          <a:latin typeface="Calibri"/>
+                          <a:ea typeface="Calibri"/>
+                        </a:rPr>
+                        <a:t> / </a:t>
+                      </a:r>
+                      <a:r>
+                        <a:rPr lang="en-US" sz="1050" b="0" strike="noStrike" spc="-1" dirty="0" err="1">
+                          <a:solidFill>
+                            <a:srgbClr val="98A2C4"/>
+                          </a:solidFill>
+                          <a:latin typeface="Calibri"/>
+                          <a:ea typeface="Calibri"/>
+                        </a:rPr>
+                        <a:t>Prüfungsphase</a:t>
+                      </a:r>
+                      <a:r>
+                        <a:rPr lang="en-US" sz="1050" b="0" strike="noStrike" spc="-1" dirty="0">
+                          <a:solidFill>
+                            <a:srgbClr val="98A2C4"/>
+                          </a:solidFill>
+                          <a:latin typeface="Calibri"/>
+                          <a:ea typeface="Calibri"/>
+                        </a:rPr>
+                        <a:t>)</a:t>
+                      </a:r>
+                      <a:endParaRPr lang="en-US" sz="1050" b="0" strike="noStrike" spc="-1" dirty="0">
                         <a:solidFill>
                           <a:srgbClr val="FFFFFF"/>
                         </a:solidFill>
@@ -29115,16 +29563,26 @@
                         </a:tabLst>
                       </a:pPr>
                       <a:r>
-                        <a:rPr lang="en-US" sz="1050" b="0" strike="noStrike" spc="-1">
+                        <a:rPr lang="en-US" sz="1050" b="0" strike="noStrike" spc="-1" dirty="0">
                           <a:solidFill>
                             <a:srgbClr val="98A2C4"/>
                           </a:solidFill>
                           <a:latin typeface="Calibri"/>
                           <a:ea typeface="Calibri"/>
                         </a:rPr>
-                        <a:t>Scope Creep – Feature-Wachstum</a:t>
+                        <a:t>Scope Creep – Feature-</a:t>
                       </a:r>
-                      <a:endParaRPr lang="en-US" sz="1050" b="0" strike="noStrike" spc="-1">
+                      <a:r>
+                        <a:rPr lang="en-US" sz="1050" b="0" strike="noStrike" spc="-1" dirty="0" err="1">
+                          <a:solidFill>
+                            <a:srgbClr val="98A2C4"/>
+                          </a:solidFill>
+                          <a:latin typeface="Calibri"/>
+                          <a:ea typeface="Calibri"/>
+                        </a:rPr>
+                        <a:t>Wachstum</a:t>
+                      </a:r>
+                      <a:endParaRPr lang="en-US" sz="1050" b="0" strike="noStrike" spc="-1" dirty="0">
                         <a:solidFill>
                           <a:srgbClr val="FFFFFF"/>
                         </a:solidFill>
@@ -30105,16 +30563,26 @@
                         </a:tabLst>
                       </a:pPr>
                       <a:r>
-                        <a:rPr lang="en-US" sz="1050" b="0" strike="noStrike" spc="-1">
+                        <a:rPr lang="en-US" sz="1050" b="0" strike="noStrike" spc="-1" dirty="0" err="1">
                           <a:solidFill>
                             <a:srgbClr val="98A2C4"/>
                           </a:solidFill>
                           <a:latin typeface="Calibri"/>
                           <a:ea typeface="Calibri"/>
                         </a:rPr>
-                        <a:t>Wöchentliche Sprints, Blogs parallel</a:t>
+                        <a:t>Wöchentliche</a:t>
                       </a:r>
-                      <a:endParaRPr lang="en-US" sz="1050" b="0" strike="noStrike" spc="-1">
+                      <a:r>
+                        <a:rPr lang="en-US" sz="1050" b="0" strike="noStrike" spc="-1" dirty="0">
+                          <a:solidFill>
+                            <a:srgbClr val="98A2C4"/>
+                          </a:solidFill>
+                          <a:latin typeface="Calibri"/>
+                          <a:ea typeface="Calibri"/>
+                        </a:rPr>
+                        <a:t> Sprints, Blogs parallel</a:t>
+                      </a:r>
+                      <a:endParaRPr lang="en-US" sz="1050" b="0" strike="noStrike" spc="-1" dirty="0">
                         <a:solidFill>
                           <a:srgbClr val="FFFFFF"/>
                         </a:solidFill>
@@ -33905,7 +34373,7 @@
         <p:spPr>
           <a:xfrm>
             <a:off x="4974480" y="1316880"/>
-            <a:ext cx="3767040" cy="2578320"/>
+            <a:ext cx="3767040" cy="2405375"/>
           </a:xfrm>
           <a:prstGeom prst="roundRect">
             <a:avLst>
@@ -33956,29 +34424,6 @@
           </a:p>
         </p:txBody>
       </p:sp>
-      <p:pic>
-        <p:nvPicPr>
-          <p:cNvPr id="616" name="Image 0" descr="/home/claude/deck/assets/transactions.png"/>
-          <p:cNvPicPr/>
-          <p:nvPr/>
-        </p:nvPicPr>
-        <p:blipFill>
-          <a:blip r:embed="rId3"/>
-          <a:stretch/>
-        </p:blipFill>
-        <p:spPr>
-          <a:xfrm>
-            <a:off x="5029200" y="1371600"/>
-            <a:ext cx="3657240" cy="2468520"/>
-          </a:xfrm>
-          <a:prstGeom prst="rect">
-            <a:avLst/>
-          </a:prstGeom>
-          <a:ln w="0">
-            <a:noFill/>
-          </a:ln>
-        </p:spPr>
-      </p:pic>
       <p:sp>
         <p:nvSpPr>
           <p:cNvPr id="617" name="Shape 1"/>
@@ -34618,6 +35063,37 @@
           </a:p>
         </p:txBody>
       </p:sp>
+      <p:pic>
+        <p:nvPicPr>
+          <p:cNvPr id="3" name="Grafik 2">
+            <a:extLst>
+              <a:ext uri="{FF2B5EF4-FFF2-40B4-BE49-F238E27FC236}">
+                <a16:creationId xmlns:a16="http://schemas.microsoft.com/office/drawing/2014/main" id="{DBCC3429-8C30-2166-CE8F-9C71AF2DA32E}"/>
+              </a:ext>
+            </a:extLst>
+          </p:cNvPr>
+          <p:cNvPicPr>
+            <a:picLocks noChangeAspect="1"/>
+          </p:cNvPicPr>
+          <p:nvPr/>
+        </p:nvPicPr>
+        <p:blipFill>
+          <a:blip r:embed="rId3"/>
+          <a:srcRect r="13100"/>
+          <a:stretch>
+            <a:fillRect/>
+          </a:stretch>
+        </p:blipFill>
+        <p:spPr>
+          <a:xfrm>
+            <a:off x="5001481" y="1371600"/>
+            <a:ext cx="3676084" cy="2302871"/>
+          </a:xfrm>
+          <a:prstGeom prst="rect">
+            <a:avLst/>
+          </a:prstGeom>
+        </p:spPr>
+      </p:pic>
     </p:spTree>
   </p:cSld>
   <p:clrMapOvr>
@@ -42212,7 +42688,7 @@
         <p:spPr>
           <a:xfrm>
             <a:off x="4105800" y="1316880"/>
-            <a:ext cx="4635720" cy="3099600"/>
+            <a:ext cx="4931982" cy="3099600"/>
           </a:xfrm>
           <a:prstGeom prst="roundRect">
             <a:avLst>
@@ -42263,29 +42739,6 @@
           </a:p>
         </p:txBody>
       </p:sp>
-      <p:pic>
-        <p:nvPicPr>
-          <p:cNvPr id="193" name="Image 0" descr="/home/claude/deck/assets/coin_detail.png"/>
-          <p:cNvPicPr/>
-          <p:nvPr/>
-        </p:nvPicPr>
-        <p:blipFill>
-          <a:blip r:embed="rId3"/>
-          <a:stretch/>
-        </p:blipFill>
-        <p:spPr>
-          <a:xfrm>
-            <a:off x="4160520" y="1371600"/>
-            <a:ext cx="4525920" cy="2989800"/>
-          </a:xfrm>
-          <a:prstGeom prst="rect">
-            <a:avLst/>
-          </a:prstGeom>
-          <a:ln w="0">
-            <a:noFill/>
-          </a:ln>
-        </p:spPr>
-      </p:pic>
       <p:sp>
         <p:nvSpPr>
           <p:cNvPr id="194" name="Text 27"/>
@@ -42350,6 +42803,37 @@
           </a:p>
         </p:txBody>
       </p:sp>
+      <p:pic>
+        <p:nvPicPr>
+          <p:cNvPr id="3" name="Grafik 2">
+            <a:extLst>
+              <a:ext uri="{FF2B5EF4-FFF2-40B4-BE49-F238E27FC236}">
+                <a16:creationId xmlns:a16="http://schemas.microsoft.com/office/drawing/2014/main" id="{DE82CF63-FA6C-BFB7-2E15-F0EAAFE5AB6D}"/>
+              </a:ext>
+            </a:extLst>
+          </p:cNvPr>
+          <p:cNvPicPr>
+            <a:picLocks noChangeAspect="1"/>
+          </p:cNvPicPr>
+          <p:nvPr/>
+        </p:nvPicPr>
+        <p:blipFill>
+          <a:blip r:embed="rId3"/>
+          <a:srcRect r="1969" b="5700"/>
+          <a:stretch>
+            <a:fillRect/>
+          </a:stretch>
+        </p:blipFill>
+        <p:spPr>
+          <a:xfrm>
+            <a:off x="4160520" y="1394454"/>
+            <a:ext cx="4813327" cy="2893866"/>
+          </a:xfrm>
+          <a:prstGeom prst="rect">
+            <a:avLst/>
+          </a:prstGeom>
+        </p:spPr>
+      </p:pic>
     </p:spTree>
   </p:cSld>
   <p:clrMapOvr>
@@ -42768,7 +43252,7 @@
         <p:spPr>
           <a:xfrm>
             <a:off x="493920" y="1271160"/>
-            <a:ext cx="4269960" cy="2898360"/>
+            <a:ext cx="4269960" cy="2668149"/>
           </a:xfrm>
           <a:prstGeom prst="roundRect">
             <a:avLst>
@@ -42819,29 +43303,6 @@
           </a:p>
         </p:txBody>
       </p:sp>
-      <p:pic>
-        <p:nvPicPr>
-          <p:cNvPr id="202" name="Image 0" descr="/home/claude/deck/assets/portfolio.png"/>
-          <p:cNvPicPr/>
-          <p:nvPr/>
-        </p:nvPicPr>
-        <p:blipFill>
-          <a:blip r:embed="rId3"/>
-          <a:stretch/>
-        </p:blipFill>
-        <p:spPr>
-          <a:xfrm>
-            <a:off x="548640" y="1325880"/>
-            <a:ext cx="4160160" cy="2788560"/>
-          </a:xfrm>
-          <a:prstGeom prst="rect">
-            <a:avLst/>
-          </a:prstGeom>
-          <a:ln w="0">
-            <a:noFill/>
-          </a:ln>
-        </p:spPr>
-      </p:pic>
       <p:sp>
         <p:nvSpPr>
           <p:cNvPr id="203" name="Shape 7"/>
@@ -42851,7 +43312,7 @@
         <p:spPr>
           <a:xfrm>
             <a:off x="4837320" y="1271160"/>
-            <a:ext cx="3812760" cy="2596680"/>
+            <a:ext cx="3812760" cy="2404913"/>
           </a:xfrm>
           <a:prstGeom prst="roundRect">
             <a:avLst>
@@ -42902,29 +43363,6 @@
           </a:p>
         </p:txBody>
       </p:sp>
-      <p:pic>
-        <p:nvPicPr>
-          <p:cNvPr id="204" name="Image 1" descr="/home/claude/deck/assets/leaderboard.png"/>
-          <p:cNvPicPr/>
-          <p:nvPr/>
-        </p:nvPicPr>
-        <p:blipFill>
-          <a:blip r:embed="rId4"/>
-          <a:stretch/>
-        </p:blipFill>
-        <p:spPr>
-          <a:xfrm>
-            <a:off x="4892040" y="1325880"/>
-            <a:ext cx="3702960" cy="2486880"/>
-          </a:xfrm>
-          <a:prstGeom prst="rect">
-            <a:avLst/>
-          </a:prstGeom>
-          <a:ln w="0">
-            <a:noFill/>
-          </a:ln>
-        </p:spPr>
-      </p:pic>
       <p:sp>
         <p:nvSpPr>
           <p:cNvPr id="205" name="Text 8"/>
@@ -42933,7 +43371,7 @@
         </p:nvSpPr>
         <p:spPr>
           <a:xfrm>
-            <a:off x="548640" y="4160520"/>
+            <a:off x="548640" y="3971180"/>
             <a:ext cx="4160160" cy="273960"/>
           </a:xfrm>
           <a:prstGeom prst="rect">
@@ -42971,16 +43409,86 @@
               </a:tabLst>
             </a:pPr>
             <a:r>
-              <a:rPr lang="en-US" sz="1000" b="0" strike="noStrike" spc="-1">
+              <a:rPr lang="en-US" sz="1000" b="0" strike="noStrike" spc="-1" dirty="0">
                 <a:solidFill>
                   <a:srgbClr val="98A2C4"/>
                 </a:solidFill>
                 <a:latin typeface="Consolas"/>
                 <a:ea typeface="Consolas"/>
               </a:rPr>
-              <a:t>Portfolio mit Wertverlauf &amp; Gewinn/Verlust</a:t>
-            </a:r>
-            <a:endParaRPr lang="en-US" sz="1000" b="0" strike="noStrike" spc="-1">
+              <a:t>Portfolio </a:t>
+            </a:r>
+            <a:r>
+              <a:rPr lang="en-US" sz="1000" b="0" strike="noStrike" spc="-1" dirty="0" err="1">
+                <a:solidFill>
+                  <a:srgbClr val="98A2C4"/>
+                </a:solidFill>
+                <a:latin typeface="Consolas"/>
+                <a:ea typeface="Consolas"/>
+              </a:rPr>
+              <a:t>mit</a:t>
+            </a:r>
+            <a:r>
+              <a:rPr lang="en-US" sz="1000" b="0" strike="noStrike" spc="-1" dirty="0">
+                <a:solidFill>
+                  <a:srgbClr val="98A2C4"/>
+                </a:solidFill>
+                <a:latin typeface="Consolas"/>
+                <a:ea typeface="Consolas"/>
+              </a:rPr>
+              <a:t> </a:t>
+            </a:r>
+            <a:r>
+              <a:rPr lang="en-US" sz="1000" b="0" strike="noStrike" spc="-1" dirty="0" err="1">
+                <a:solidFill>
+                  <a:srgbClr val="98A2C4"/>
+                </a:solidFill>
+                <a:latin typeface="Consolas"/>
+                <a:ea typeface="Consolas"/>
+              </a:rPr>
+              <a:t>Wertverlauf</a:t>
+            </a:r>
+            <a:r>
+              <a:rPr lang="en-US" sz="1000" b="0" strike="noStrike" spc="-1" dirty="0">
+                <a:solidFill>
+                  <a:srgbClr val="98A2C4"/>
+                </a:solidFill>
+                <a:latin typeface="Consolas"/>
+                <a:ea typeface="Consolas"/>
+              </a:rPr>
+              <a:t> &amp; </a:t>
+            </a:r>
+            <a:r>
+              <a:rPr lang="en-US" sz="1000" b="0" strike="noStrike" spc="-1" dirty="0" err="1">
+                <a:solidFill>
+                  <a:srgbClr val="98A2C4"/>
+                </a:solidFill>
+                <a:latin typeface="Consolas"/>
+                <a:ea typeface="Consolas"/>
+              </a:rPr>
+              <a:t>Gewinn</a:t>
+            </a:r>
+            <a:r>
+              <a:rPr lang="en-US" sz="1000" b="0" strike="noStrike" spc="-1" dirty="0">
+                <a:solidFill>
+                  <a:srgbClr val="98A2C4"/>
+                </a:solidFill>
+                <a:latin typeface="Consolas"/>
+                <a:ea typeface="Consolas"/>
+              </a:rPr>
+              <a:t>/</a:t>
+            </a:r>
+            <a:r>
+              <a:rPr lang="en-US" sz="1000" b="0" strike="noStrike" spc="-1" dirty="0" err="1">
+                <a:solidFill>
+                  <a:srgbClr val="98A2C4"/>
+                </a:solidFill>
+                <a:latin typeface="Consolas"/>
+                <a:ea typeface="Consolas"/>
+              </a:rPr>
+              <a:t>Verlust</a:t>
+            </a:r>
+            <a:endParaRPr lang="en-US" sz="1000" b="0" strike="noStrike" spc="-1" dirty="0">
               <a:solidFill>
                 <a:srgbClr val="FFFFFF"/>
               </a:solidFill>
@@ -42997,7 +43505,7 @@
         </p:nvSpPr>
         <p:spPr>
           <a:xfrm>
-            <a:off x="4892040" y="3886200"/>
+            <a:off x="4892040" y="3710711"/>
             <a:ext cx="3702960" cy="273960"/>
           </a:xfrm>
           <a:prstGeom prst="rect">
@@ -43596,6 +44104,66 @@
           </a:p>
         </p:txBody>
       </p:sp>
+      <p:pic>
+        <p:nvPicPr>
+          <p:cNvPr id="3" name="Grafik 2">
+            <a:extLst>
+              <a:ext uri="{FF2B5EF4-FFF2-40B4-BE49-F238E27FC236}">
+                <a16:creationId xmlns:a16="http://schemas.microsoft.com/office/drawing/2014/main" id="{E1F6F8E7-295C-24DC-8AAA-8840F907E5CD}"/>
+              </a:ext>
+            </a:extLst>
+          </p:cNvPr>
+          <p:cNvPicPr>
+            <a:picLocks noChangeAspect="1"/>
+          </p:cNvPicPr>
+          <p:nvPr/>
+        </p:nvPicPr>
+        <p:blipFill>
+          <a:blip r:embed="rId3"/>
+          <a:stretch>
+            <a:fillRect/>
+          </a:stretch>
+        </p:blipFill>
+        <p:spPr>
+          <a:xfrm>
+            <a:off x="548641" y="1296656"/>
+            <a:ext cx="4126028" cy="2598904"/>
+          </a:xfrm>
+          <a:prstGeom prst="rect">
+            <a:avLst/>
+          </a:prstGeom>
+        </p:spPr>
+      </p:pic>
+      <p:pic>
+        <p:nvPicPr>
+          <p:cNvPr id="5" name="Grafik 4">
+            <a:extLst>
+              <a:ext uri="{FF2B5EF4-FFF2-40B4-BE49-F238E27FC236}">
+                <a16:creationId xmlns:a16="http://schemas.microsoft.com/office/drawing/2014/main" id="{B04E33BC-EF55-E5E6-91DC-9952ECE79F36}"/>
+              </a:ext>
+            </a:extLst>
+          </p:cNvPr>
+          <p:cNvPicPr>
+            <a:picLocks noChangeAspect="1"/>
+          </p:cNvPicPr>
+          <p:nvPr/>
+        </p:nvPicPr>
+        <p:blipFill>
+          <a:blip r:embed="rId4"/>
+          <a:stretch>
+            <a:fillRect/>
+          </a:stretch>
+        </p:blipFill>
+        <p:spPr>
+          <a:xfrm>
+            <a:off x="4873568" y="1369728"/>
+            <a:ext cx="3747708" cy="2225062"/>
+          </a:xfrm>
+          <a:prstGeom prst="rect">
+            <a:avLst/>
+          </a:prstGeom>
+        </p:spPr>
+      </p:pic>
     </p:spTree>
   </p:cSld>
   <p:clrMapOvr>
